--- a/06_relazioni_e_parametri/Slides_v3/06_decomposizione-suzuki-trotter.pptx
+++ b/06_relazioni_e_parametri/Slides_v3/06_decomposizione-suzuki-trotter.pptx
@@ -8,7 +8,7 @@
     <p:notesMasterId r:id="rId3"/>
   </p:notesMasterIdLst>
   <p:sldIdLst>
-    <p:sldId id="265" r:id="rId2"/>
+    <p:sldId id="266" r:id="rId2"/>
   </p:sldIdLst>
   <p:sldSz cx="12192000" cy="6858000"/>
   <p:notesSz cx="6858000" cy="12192000"/>
@@ -697,8 +697,8 @@
         </p:nvSpPr>
         <p:spPr>
           <a:xfrm>
-            <a:off x="640080" y="713232"/>
-            <a:ext cx="8229600" cy="777240"/>
+            <a:off x="640079" y="713232"/>
+            <a:ext cx="10911535" cy="777240"/>
           </a:xfrm>
           <a:prstGeom prst="rect">
             <a:avLst/>
@@ -714,7 +714,7 @@
               <a:buNone/>
             </a:pPr>
             <a:r>
-              <a:rPr lang="en-US" sz="3800" b="1" dirty="0" err="1">
+              <a:rPr lang="en-US" sz="3600" b="1" dirty="0" err="1">
                 <a:solidFill>
                   <a:srgbClr val="16233A"/>
                 </a:solidFill>
@@ -725,7 +725,7 @@
               <a:t>Decomposizione</a:t>
             </a:r>
             <a:r>
-              <a:rPr lang="en-US" sz="3800" b="1" dirty="0">
+              <a:rPr lang="en-US" sz="3600" b="1" dirty="0">
                 <a:solidFill>
                   <a:srgbClr val="16233A"/>
                 </a:solidFill>
@@ -735,7 +735,7 @@
               </a:rPr>
               <a:t> di Suzuki-Trotter</a:t>
             </a:r>
-            <a:endParaRPr lang="en-US" sz="3800" dirty="0"/>
+            <a:endParaRPr lang="en-US" sz="3600" dirty="0"/>
           </a:p>
         </p:txBody>
       </p:sp>
@@ -747,7 +747,7 @@
         </p:nvSpPr>
         <p:spPr>
           <a:xfrm>
-            <a:off x="640080" y="1554480"/>
+            <a:off x="640080" y="1490472"/>
             <a:ext cx="10911535" cy="530352"/>
           </a:xfrm>
           <a:prstGeom prst="roundRect">
@@ -776,7 +776,7 @@
         </p:nvSpPr>
         <p:spPr>
           <a:xfrm>
-            <a:off x="640080" y="1554480"/>
+            <a:off x="640080" y="1490472"/>
             <a:ext cx="10911535" cy="530352"/>
           </a:xfrm>
           <a:prstGeom prst="rect">
@@ -793,7 +793,7 @@
               <a:buNone/>
             </a:pPr>
             <a:r>
-              <a:rPr lang="en-US" sz="2100" b="1" dirty="0" err="1">
+              <a:rPr lang="en-US" sz="2100" b="1" i="1" dirty="0" err="1">
                 <a:solidFill>
                   <a:srgbClr val="173A5E"/>
                 </a:solidFill>
@@ -804,7 +804,7 @@
               <a:t>Simulazione</a:t>
             </a:r>
             <a:r>
-              <a:rPr lang="en-US" sz="2100" b="1" dirty="0">
+              <a:rPr lang="en-US" sz="2100" b="1" i="1" dirty="0">
                 <a:solidFill>
                   <a:srgbClr val="173A5E"/>
                 </a:solidFill>
@@ -815,7 +815,7 @@
               <a:t> </a:t>
             </a:r>
             <a:r>
-              <a:rPr lang="en-US" sz="2100" b="1" dirty="0" err="1">
+              <a:rPr lang="en-US" sz="2100" b="1" i="1" dirty="0" err="1">
                 <a:solidFill>
                   <a:srgbClr val="173A5E"/>
                 </a:solidFill>
@@ -826,7 +826,7 @@
               <a:t>dell’evoluzione</a:t>
             </a:r>
             <a:r>
-              <a:rPr lang="en-US" sz="2100" b="1" dirty="0">
+              <a:rPr lang="en-US" sz="2100" b="1" i="1" dirty="0">
                 <a:solidFill>
                   <a:srgbClr val="173A5E"/>
                 </a:solidFill>
@@ -837,7 +837,7 @@
               <a:t> </a:t>
             </a:r>
             <a:r>
-              <a:rPr lang="en-US" sz="2100" b="1" dirty="0" err="1">
+              <a:rPr lang="en-US" sz="2100" b="1" i="1" dirty="0" err="1">
                 <a:solidFill>
                   <a:srgbClr val="173A5E"/>
                 </a:solidFill>
@@ -848,7 +848,7 @@
               <a:t>temporale</a:t>
             </a:r>
             <a:r>
-              <a:rPr lang="en-US" sz="2100" b="1" dirty="0">
+              <a:rPr lang="en-US" sz="2100" b="1" i="1" dirty="0">
                 <a:solidFill>
                   <a:srgbClr val="173A5E"/>
                 </a:solidFill>
@@ -859,7 +859,7 @@
               <a:t> di un </a:t>
             </a:r>
             <a:r>
-              <a:rPr lang="en-US" sz="2100" b="1" dirty="0" err="1">
+              <a:rPr lang="en-US" sz="2100" b="1" i="1" dirty="0" err="1">
                 <a:solidFill>
                   <a:srgbClr val="173A5E"/>
                 </a:solidFill>
@@ -870,7 +870,7 @@
               <a:t>sistema</a:t>
             </a:r>
             <a:r>
-              <a:rPr lang="en-US" sz="2100" b="1" dirty="0">
+              <a:rPr lang="en-US" sz="2100" b="1" i="1" dirty="0">
                 <a:solidFill>
                   <a:srgbClr val="173A5E"/>
                 </a:solidFill>
@@ -881,7 +881,7 @@
               <a:t> </a:t>
             </a:r>
             <a:r>
-              <a:rPr lang="en-US" sz="2100" b="1" dirty="0" err="1">
+              <a:rPr lang="en-US" sz="2100" b="1" i="1" dirty="0" err="1">
                 <a:solidFill>
                   <a:srgbClr val="173A5E"/>
                 </a:solidFill>
@@ -891,7 +891,7 @@
               </a:rPr>
               <a:t>quantistico</a:t>
             </a:r>
-            <a:endParaRPr lang="en-US" sz="2100" dirty="0"/>
+            <a:endParaRPr lang="en-US" sz="2100" i="1" dirty="0"/>
           </a:p>
         </p:txBody>
       </p:sp>
